--- a/public/fun/pack/pptx/birthdaypro/돌잔치프리미엄_26_성장기록중심_버건디샴페인.pptx
+++ b/public/fun/pack/pptx/birthdaypro/돌잔치프리미엄_26_성장기록중심_버건디샴페인.pptx
@@ -112,12 +112,12 @@
   <p:extLst>
     <p:ext uri="{521415D9-36F7-43E2-AB2F-B90AF26B5E84}">
       <p14:sectionLst xmlns:p14="http://schemas.microsoft.com/office/powerpoint/2010/main">
-        <p14:section name="시작" id="{12C281CD-C894-4A3C-84BC-A0A3F0A7F90D}">
+        <p14:section name="시작" id="{3E8F4507-50AC-4D86-AFFC-254132DEFFC9}">
           <p14:sldIdLst>
             <p14:sldId id="256"/>
           </p14:sldIdLst>
         </p14:section>
-        <p14:section name="본문" id="{D3EFA6CC-54A0-4CB2-B473-CFAB14072928}">
+        <p14:section name="본문" id="{F9866A2F-BDF6-497C-8E5E-9E30D70D08F5}">
           <p14:sldIdLst>
             <p14:sldId id="257"/>
             <p14:sldId id="258"/>
@@ -125,7 +125,7 @@
             <p14:sldId id="260"/>
           </p14:sldIdLst>
         </p14:section>
-        <p14:section name="마무리" id="{F3721196-F0B7-4A77-8065-ECB1AD5CC2BF}">
+        <p14:section name="마무리" id="{6AA53545-7E28-4194-90AF-81D8BE6E8DF1}">
           <p14:sldIdLst>
             <p14:sldId id="261"/>
           </p14:sldIdLst>
@@ -1692,7 +1692,7 @@
             </a:lvl1pPr>
           </a:lstStyle>
           <a:p>
-            <a:fld id="{578C5506-4B74-41CC-9E58-DFC6905A7354}" type="slidenum">
+            <a:fld id="{75F00FED-888D-482F-8809-B73F264E161C}" type="slidenum">
               <a:rPr lang="en-US"/>
               <a:t>‹#›</a:t>
             </a:fld>
@@ -2452,7 +2452,7 @@
             </a:lvl1pPr>
           </a:lstStyle>
           <a:p>
-            <a:fld id="{19278C59-A017-4E20-B8CD-9741738417DD}" type="slidenum">
+            <a:fld id="{D3A0E223-089A-4942-9B64-3B6E8945B11C}" type="slidenum">
               <a:rPr lang="en-US"/>
               <a:t>‹#›</a:t>
             </a:fld>
@@ -3136,7 +3136,7 @@
             </a:lvl1pPr>
           </a:lstStyle>
           <a:p>
-            <a:fld id="{77EC699E-8917-423E-9975-127ED2C5899F}" type="slidenum">
+            <a:fld id="{5A7EE92B-C1A9-4E08-8D88-1FCEDDC1894A}" type="slidenum">
               <a:rPr lang="en-US"/>
               <a:t>‹#›</a:t>
             </a:fld>
@@ -3981,7 +3981,7 @@
           <a:p>
             <a:r>
               <a:rPr lang="ko-KR"/>
-              <a:t>아기 이름 · 0000. 00. 00</a:t>
+              <a:t>아기 이름 · 날짜 입력</a:t>
             </a:r>
           </a:p>
           <a:p>
@@ -4144,7 +4144,7 @@
           <a:bodyPr/>
           <a:lstStyle/>
           <a:p>
-            <a:fld id="{C4BD92C6-77E1-446A-8FED-B7959D3F9FC0}" type="slidenum">
+            <a:fld id="{52D6998F-23D8-463A-A732-DF9EDC199A85}" type="slidenum">
               <a:rPr lang="en-US"/>
               <a:t>‹#›</a:t>
             </a:fld>
@@ -4744,7 +4744,7 @@
           <a:bodyPr/>
           <a:lstStyle/>
           <a:p>
-            <a:fld id="{88112FA9-CC53-4A89-BCE1-A6DF4543A34C}" type="slidenum">
+            <a:fld id="{87290ADC-E920-4DA0-A130-9A1D4AC8049C}" type="slidenum">
               <a:rPr lang="en-US"/>
               <a:t>‹#›</a:t>
             </a:fld>
@@ -5764,7 +5764,7 @@
           <a:bodyPr/>
           <a:lstStyle/>
           <a:p>
-            <a:fld id="{FFA18D2D-4E79-4EA2-9E7D-69717A2EB512}" type="slidenum">
+            <a:fld id="{FF6BF675-2BFF-42BF-8D1A-5F8A8FCDFC13}" type="slidenum">
               <a:rPr lang="en-US"/>
               <a:t>‹#›</a:t>
             </a:fld>
@@ -6439,7 +6439,7 @@
           <a:bodyPr/>
           <a:lstStyle/>
           <a:p>
-            <a:fld id="{5BFCF8AB-2F28-4885-BCA1-DEA098FD46D2}" type="slidenum">
+            <a:fld id="{46C2D2B1-8F61-4CB3-BDC2-5613D142EFB3}" type="slidenum">
               <a:rPr lang="en-US"/>
               <a:t>‹#›</a:t>
             </a:fld>
